--- a/23CS653_Mini_Project_First_review_Presentation_template_1772087917539-2.pptx
+++ b/23CS653_Mini_Project_First_review_Presentation_template_1772087917539-2.pptx
@@ -289,7 +289,7 @@
       </p15:sldGuideLst>
     </p:ext>
     <p:ext uri="http://customooxmlschemas.google.com/">
-      <go:slidesCustomData xmlns="" xmlns:mc="http://schemas.openxmlformats.org/markup-compatibility/2006" xmlns:mv="urn:schemas-microsoft-com:mac:vml" xmlns:c="http://schemas.openxmlformats.org/drawingml/2006/chart" xmlns:dgm="http://schemas.openxmlformats.org/drawingml/2006/diagram" xmlns:o="urn:schemas-microsoft-com:office:office" xmlns:v="urn:schemas-microsoft-com:vml" xmlns:pvml="urn:schemas-microsoft-com:office:powerpoint" xmlns:com="http://schemas.openxmlformats.org/drawingml/2006/compatibility" xmlns:p14="http://schemas.microsoft.com/office/powerpoint/2010/main" xmlns:p15="http://schemas.microsoft.com/office/powerpoint/2012/main" xmlns:ahyp="http://schemas.microsoft.com/office/drawing/2018/hyperlinkcolor" xmlns:go="http://customooxmlschemas.google.com/" r:id="rId112" roundtripDataSignature="AMtx7mhhhuhGjdxSZihv3VWfUV2Jn9QCRg=="/>
+      <go:slidesCustomData xmlns:go="http://customooxmlschemas.google.com/" xmlns:ahyp="http://schemas.microsoft.com/office/drawing/2018/hyperlinkcolor" xmlns:p15="http://schemas.microsoft.com/office/powerpoint/2012/main" xmlns:p14="http://schemas.microsoft.com/office/powerpoint/2010/main" xmlns:com="http://schemas.openxmlformats.org/drawingml/2006/compatibility" xmlns:pvml="urn:schemas-microsoft-com:office:powerpoint" xmlns:v="urn:schemas-microsoft-com:vml" xmlns:o="urn:schemas-microsoft-com:office:office" xmlns:dgm="http://schemas.openxmlformats.org/drawingml/2006/diagram" xmlns:c="http://schemas.openxmlformats.org/drawingml/2006/chart" xmlns:mv="urn:schemas-microsoft-com:mac:vml" xmlns:mc="http://schemas.openxmlformats.org/markup-compatibility/2006" xmlns="" r:id="rId112" roundtripDataSignature="AMtx7mhhhuhGjdxSZihv3VWfUV2Jn9QCRg=="/>
     </p:ext>
   </p:extLst>
 </p:presentation>
@@ -9461,7 +9461,7 @@
             <a:fld id="{7F70A785-156C-425F-A2D8-966122E547E5}" type="datetime3">
               <a:rPr lang="en-US" smtClean="0"/>
               <a:pPr/>
-              <a:t>2 March 2026</a:t>
+              <a:t>29 March 2026</a:t>
             </a:fld>
             <a:endParaRPr/>
           </a:p>
@@ -10288,7 +10288,7 @@
             <a:fld id="{386948D6-0002-44A7-B245-A5E38AE83685}" type="datetime3">
               <a:rPr lang="en-US" smtClean="0"/>
               <a:pPr/>
-              <a:t>2 March 2026</a:t>
+              <a:t>29 March 2026</a:t>
             </a:fld>
             <a:endParaRPr/>
           </a:p>
@@ -11275,7 +11275,7 @@
             <a:fld id="{97742EA7-CD33-43EC-8EA7-47D30631274E}" type="datetime3">
               <a:rPr lang="en-US" smtClean="0"/>
               <a:pPr/>
-              <a:t>2 March 2026</a:t>
+              <a:t>29 March 2026</a:t>
             </a:fld>
             <a:endParaRPr/>
           </a:p>
@@ -12267,7 +12267,7 @@
             <a:fld id="{F484804C-E2C2-44BE-BCFD-8053EB60501D}" type="datetime3">
               <a:rPr lang="en-US" smtClean="0"/>
               <a:pPr/>
-              <a:t>2 March 2026</a:t>
+              <a:t>29 March 2026</a:t>
             </a:fld>
             <a:endParaRPr/>
           </a:p>
@@ -13259,7 +13259,7 @@
             <a:fld id="{F693C889-72BB-4A3F-88FF-DB5D79B46C9F}" type="datetime3">
               <a:rPr lang="en-US" smtClean="0"/>
               <a:pPr/>
-              <a:t>2 March 2026</a:t>
+              <a:t>29 March 2026</a:t>
             </a:fld>
             <a:endParaRPr/>
           </a:p>
@@ -14433,7 +14433,7 @@
             <a:fld id="{68438443-5994-46C8-AEEF-2D59BC6E7C9E}" type="datetime3">
               <a:rPr lang="en-US" smtClean="0"/>
               <a:pPr/>
-              <a:t>2 March 2026</a:t>
+              <a:t>29 March 2026</a:t>
             </a:fld>
             <a:endParaRPr/>
           </a:p>
@@ -15991,7 +15991,7 @@
             <a:fld id="{28E5C271-FA14-4B19-BFBF-3563F3BF711E}" type="datetime3">
               <a:rPr lang="en-US" smtClean="0"/>
               <a:pPr/>
-              <a:t>2 March 2026</a:t>
+              <a:t>29 March 2026</a:t>
             </a:fld>
             <a:endParaRPr/>
           </a:p>
@@ -17175,7 +17175,7 @@
             <a:fld id="{8A449154-40C0-463B-9870-DE851E5650F2}" type="datetime3">
               <a:rPr lang="en-US" smtClean="0"/>
               <a:pPr/>
-              <a:t>2 March 2026</a:t>
+              <a:t>29 March 2026</a:t>
             </a:fld>
             <a:endParaRPr/>
           </a:p>
@@ -18198,7 +18198,7 @@
             <a:fld id="{4E899386-CBAA-4D39-AF2D-8EC1DE21406A}" type="datetime3">
               <a:rPr lang="en-US" smtClean="0"/>
               <a:pPr/>
-              <a:t>2 March 2026</a:t>
+              <a:t>29 March 2026</a:t>
             </a:fld>
             <a:endParaRPr/>
           </a:p>
@@ -19185,7 +19185,7 @@
             <a:fld id="{48094A4C-1916-4AF1-A1C2-EDC0C0EC293E}" type="datetime3">
               <a:rPr lang="en-US" smtClean="0"/>
               <a:pPr/>
-              <a:t>2 March 2026</a:t>
+              <a:t>29 March 2026</a:t>
             </a:fld>
             <a:endParaRPr/>
           </a:p>
@@ -20479,7 +20479,7 @@
             <a:fld id="{B8A5363C-25EE-49EE-8F58-FC70F37812F9}" type="datetime3">
               <a:rPr lang="en-US" smtClean="0"/>
               <a:pPr/>
-              <a:t>2 March 2026</a:t>
+              <a:t>29 March 2026</a:t>
             </a:fld>
             <a:endParaRPr/>
           </a:p>
@@ -22057,7 +22057,7 @@
                 <a:buFont typeface="Arial Rounded"/>
                 <a:buNone/>
               </a:pPr>
-              <a:t>2 March 2026</a:t>
+              <a:t>29 March 2026</a:t>
             </a:fld>
             <a:endParaRPr sz="1400" b="1" i="0" u="none" strike="noStrike" cap="none">
               <a:solidFill>
@@ -22247,7 +22247,7 @@
         <p:spPr>
           <a:xfrm>
             <a:off x="827584" y="2503488"/>
-            <a:ext cx="7272808" cy="646290"/>
+            <a:ext cx="7272808" cy="1754286"/>
           </a:xfrm>
           <a:prstGeom prst="rect">
             <a:avLst/>
@@ -22274,7 +22274,7 @@
                 <a:latin typeface="Times New Roman" panose="02020603050405020304" pitchFamily="18" charset="0"/>
                 <a:cs typeface="Times New Roman" panose="02020603050405020304" pitchFamily="18" charset="0"/>
               </a:rPr>
-              <a:t>Binary Code Analysis</a:t>
+              <a:t>Automated Vulnerable Data Detection Using Binary to source  Code Similarity Analysis</a:t>
             </a:r>
             <a:endParaRPr lang="en-US" sz="3600" b="1" i="0" u="none" strike="noStrike" cap="none" dirty="0">
               <a:solidFill>
@@ -22901,7 +22901,7 @@
                 <a:buFont typeface="Arial Rounded"/>
                 <a:buNone/>
               </a:pPr>
-              <a:t>2 March 2026</a:t>
+              <a:t>29 March 2026</a:t>
             </a:fld>
             <a:endParaRPr sz="1400" b="1" i="0" u="none" strike="noStrike" cap="none" dirty="0">
               <a:solidFill>
@@ -23943,7 +23943,7 @@
                 <a:buFont typeface="Arial Rounded"/>
                 <a:buNone/>
               </a:pPr>
-              <a:t>2 March 2026</a:t>
+              <a:t>29 March 2026</a:t>
             </a:fld>
             <a:endParaRPr sz="1400" b="1" i="0" u="none" strike="noStrike" cap="none" dirty="0">
               <a:solidFill>
@@ -24951,7 +24951,7 @@
                 <a:buFont typeface="Arial Rounded"/>
                 <a:buNone/>
               </a:pPr>
-              <a:t>2 March 2026</a:t>
+              <a:t>29 March 2026</a:t>
             </a:fld>
             <a:endParaRPr sz="1400" b="1" i="0" u="none" strike="noStrike" cap="none" dirty="0">
               <a:solidFill>
@@ -25997,7 +25997,7 @@
                 <a:buFont typeface="Arial Rounded"/>
                 <a:buNone/>
               </a:pPr>
-              <a:t>2 March 2026</a:t>
+              <a:t>29 March 2026</a:t>
             </a:fld>
             <a:endParaRPr sz="1400" b="1" i="0" u="none" strike="noStrike" cap="none" dirty="0">
               <a:solidFill>
@@ -27005,7 +27005,7 @@
                 <a:buFont typeface="Arial Rounded"/>
                 <a:buNone/>
               </a:pPr>
-              <a:t>2 March 2026</a:t>
+              <a:t>29 March 2026</a:t>
             </a:fld>
             <a:endParaRPr sz="1400" b="1" i="0" u="none" strike="noStrike" cap="none" dirty="0">
               <a:solidFill>
@@ -28037,7 +28037,7 @@
                 <a:buFont typeface="Arial Rounded"/>
                 <a:buNone/>
               </a:pPr>
-              <a:t>2 March 2026</a:t>
+              <a:t>29 March 2026</a:t>
             </a:fld>
             <a:endParaRPr sz="1400" b="1" i="0" u="none" strike="noStrike" cap="none" dirty="0">
               <a:solidFill>
@@ -29038,7 +29038,7 @@
                 <a:buFont typeface="Arial Rounded"/>
                 <a:buNone/>
               </a:pPr>
-              <a:t>2 March 2026</a:t>
+              <a:t>29 March 2026</a:t>
             </a:fld>
             <a:endParaRPr sz="1400" b="1" i="0" u="none" strike="noStrike" cap="none" dirty="0">
               <a:solidFill>
@@ -30073,7 +30073,7 @@
                 <a:buFont typeface="Arial Rounded"/>
                 <a:buNone/>
               </a:pPr>
-              <a:t>2 March 2026</a:t>
+              <a:t>29 March 2026</a:t>
             </a:fld>
             <a:endParaRPr sz="1400" b="1" i="0" u="none" strike="noStrike" cap="none" dirty="0">
               <a:solidFill>
@@ -31081,7 +31081,7 @@
                 <a:buFont typeface="Arial Rounded"/>
                 <a:buNone/>
               </a:pPr>
-              <a:t>2 March 2026</a:t>
+              <a:t>29 March 2026</a:t>
             </a:fld>
             <a:endParaRPr sz="1400" b="1" i="0" u="none" strike="noStrike" cap="none" dirty="0">
               <a:solidFill>
@@ -32099,7 +32099,7 @@
                 <a:buFont typeface="Arial Rounded"/>
                 <a:buNone/>
               </a:pPr>
-              <a:t>2 March 2026</a:t>
+              <a:t>29 March 2026</a:t>
             </a:fld>
             <a:endParaRPr sz="1400" b="1" i="0" u="none" strike="noStrike" cap="none" dirty="0">
               <a:solidFill>
@@ -33137,7 +33137,7 @@
                 <a:buFont typeface="Arial Rounded"/>
                 <a:buNone/>
               </a:pPr>
-              <a:t>2 March 2026</a:t>
+              <a:t>29 March 2026</a:t>
             </a:fld>
             <a:endParaRPr sz="1400" b="1" i="0" u="none" strike="noStrike" cap="none">
               <a:solidFill>
@@ -33734,7 +33734,7 @@
                 <a:buFont typeface="Arial Rounded"/>
                 <a:buNone/>
               </a:pPr>
-              <a:t>2 March 2026</a:t>
+              <a:t>29 March 2026</a:t>
             </a:fld>
             <a:endParaRPr sz="1400" b="1" i="0" u="none" strike="noStrike" cap="none" dirty="0">
               <a:solidFill>
@@ -34762,7 +34762,7 @@
                 <a:buFont typeface="Arial Rounded"/>
                 <a:buNone/>
               </a:pPr>
-              <a:t>2 March 2026</a:t>
+              <a:t>29 March 2026</a:t>
             </a:fld>
             <a:endParaRPr sz="1400" b="1" i="0" u="none" strike="noStrike" cap="none" dirty="0">
               <a:solidFill>
@@ -35777,7 +35777,7 @@
                 <a:buFont typeface="Arial Rounded"/>
                 <a:buNone/>
               </a:pPr>
-              <a:t>2 March 2026</a:t>
+              <a:t>29 March 2026</a:t>
             </a:fld>
             <a:endParaRPr sz="1400" b="1" i="0" u="none" strike="noStrike" cap="none" dirty="0">
               <a:solidFill>
@@ -36778,7 +36778,7 @@
                 <a:buFont typeface="Arial Rounded"/>
                 <a:buNone/>
               </a:pPr>
-              <a:t>2 March 2026</a:t>
+              <a:t>29 March 2026</a:t>
             </a:fld>
             <a:endParaRPr sz="1400" b="1" i="0" u="none" strike="noStrike" cap="none" dirty="0">
               <a:solidFill>
@@ -37775,7 +37775,7 @@
                 <a:buFont typeface="Arial Rounded"/>
                 <a:buNone/>
               </a:pPr>
-              <a:t>2 March 2026</a:t>
+              <a:t>29 March 2026</a:t>
             </a:fld>
             <a:endParaRPr sz="1400" b="1" i="0" u="none" strike="noStrike" cap="none" dirty="0">
               <a:solidFill>
@@ -38796,7 +38796,7 @@
                 <a:buFont typeface="Arial Rounded"/>
                 <a:buNone/>
               </a:pPr>
-              <a:t>2 March 2026</a:t>
+              <a:t>29 March 2026</a:t>
             </a:fld>
             <a:endParaRPr sz="1400" b="1" i="0" u="none" strike="noStrike" cap="none" dirty="0">
               <a:solidFill>
@@ -39757,7 +39757,7 @@
                 <a:buFont typeface="Arial Rounded"/>
                 <a:buNone/>
               </a:pPr>
-              <a:t>2 March 2026</a:t>
+              <a:t>29 March 2026</a:t>
             </a:fld>
             <a:endParaRPr sz="1400" b="1" i="0" u="none" strike="noStrike" cap="none" dirty="0">
               <a:solidFill>
@@ -41139,7 +41139,7 @@
                 <a:buFont typeface="Arial Rounded"/>
                 <a:buNone/>
               </a:pPr>
-              <a:t>2 March 2026</a:t>
+              <a:t>29 March 2026</a:t>
             </a:fld>
             <a:endParaRPr sz="1400" b="1" i="0" u="none" strike="noStrike" cap="none" dirty="0">
               <a:solidFill>
@@ -42584,7 +42584,7 @@
                 <a:buFont typeface="Arial Rounded"/>
                 <a:buNone/>
               </a:pPr>
-              <a:t>2 March 2026</a:t>
+              <a:t>29 March 2026</a:t>
             </a:fld>
             <a:endParaRPr sz="1400" b="1" i="0" u="none" strike="noStrike" cap="none" dirty="0">
               <a:solidFill>
@@ -43785,7 +43785,7 @@
                 <a:buFont typeface="Arial Rounded"/>
                 <a:buNone/>
               </a:pPr>
-              <a:t>2 March 2026</a:t>
+              <a:t>29 March 2026</a:t>
             </a:fld>
             <a:endParaRPr sz="1400" b="1" i="0" u="none" strike="noStrike" cap="none" dirty="0">
               <a:solidFill>
@@ -44789,7 +44789,7 @@
                 <a:buFont typeface="Arial Rounded"/>
                 <a:buNone/>
               </a:pPr>
-              <a:t>2 March 2026</a:t>
+              <a:t>29 March 2026</a:t>
             </a:fld>
             <a:endParaRPr sz="1400" b="1" i="0" u="none" strike="noStrike" cap="none" dirty="0">
               <a:solidFill>
@@ -45638,7 +45638,7 @@
                 <a:buFont typeface="Arial Rounded"/>
                 <a:buNone/>
               </a:pPr>
-              <a:t>2 March 2026</a:t>
+              <a:t>29 March 2026</a:t>
             </a:fld>
             <a:endParaRPr sz="1400" b="1" i="0" u="none" strike="noStrike" cap="none" dirty="0">
               <a:solidFill>
@@ -46614,7 +46614,7 @@
                 <a:buFont typeface="Arial Rounded"/>
                 <a:buNone/>
               </a:pPr>
-              <a:t>2 March 2026</a:t>
+              <a:t>29 March 2026</a:t>
             </a:fld>
             <a:endParaRPr sz="1400" b="1" i="0" u="none" strike="noStrike" cap="none" dirty="0">
               <a:solidFill>
@@ -47651,7 +47651,7 @@
                 <a:buFont typeface="Arial Rounded"/>
                 <a:buNone/>
               </a:pPr>
-              <a:t>2 March 2026</a:t>
+              <a:t>29 March 2026</a:t>
             </a:fld>
             <a:endParaRPr sz="1400" b="1" i="0" u="none" strike="noStrike" cap="none" dirty="0">
               <a:solidFill>
@@ -48601,7 +48601,7 @@
                 <a:buFont typeface="Arial Rounded"/>
                 <a:buNone/>
               </a:pPr>
-              <a:t>2 March 2026</a:t>
+              <a:t>29 March 2026</a:t>
             </a:fld>
             <a:endParaRPr sz="1400" b="1" i="0" u="none" strike="noStrike" cap="none" dirty="0">
               <a:solidFill>
@@ -49158,7 +49158,7 @@
                 <a:buFont typeface="Arial Rounded"/>
                 <a:buNone/>
               </a:pPr>
-              <a:t>2 March 2026</a:t>
+              <a:t>29 March 2026</a:t>
             </a:fld>
             <a:endParaRPr sz="1400" b="1" i="0" u="none" strike="noStrike" cap="none">
               <a:solidFill>
@@ -50071,7 +50071,7 @@
                 <a:buFont typeface="Arial Rounded"/>
                 <a:buNone/>
               </a:pPr>
-              <a:t>2 March 2026</a:t>
+              <a:t>29 March 2026</a:t>
             </a:fld>
             <a:endParaRPr sz="1400" b="1" i="0" u="none" strike="noStrike" cap="none" dirty="0">
               <a:solidFill>
@@ -50995,7 +50995,7 @@
                 <a:buFont typeface="Arial Rounded"/>
                 <a:buNone/>
               </a:pPr>
-              <a:t>2 March 2026</a:t>
+              <a:t>29 March 2026</a:t>
             </a:fld>
             <a:endParaRPr sz="1400" b="1" i="0" u="none" strike="noStrike" cap="none" dirty="0">
               <a:solidFill>
@@ -51998,7 +51998,7 @@
                 <a:buFont typeface="Arial Rounded"/>
                 <a:buNone/>
               </a:pPr>
-              <a:t>2 March 2026</a:t>
+              <a:t>29 March 2026</a:t>
             </a:fld>
             <a:endParaRPr sz="1400" b="1" i="0" u="none" strike="noStrike" cap="none" dirty="0">
               <a:solidFill>
@@ -53005,7 +53005,7 @@
                 <a:buFont typeface="Arial Rounded"/>
                 <a:buNone/>
               </a:pPr>
-              <a:t>2 March 2026</a:t>
+              <a:t>29 March 2026</a:t>
             </a:fld>
             <a:endParaRPr sz="1400" b="1" i="0" u="none" strike="noStrike" cap="none" dirty="0">
               <a:solidFill>
@@ -54056,7 +54056,7 @@
                 <a:buFont typeface="Arial Rounded"/>
                 <a:buNone/>
               </a:pPr>
-              <a:t>2 March 2026</a:t>
+              <a:t>29 March 2026</a:t>
             </a:fld>
             <a:endParaRPr sz="1400" b="1" i="0" u="none" strike="noStrike" cap="none" dirty="0">
               <a:solidFill>
